--- a/敬拜的心.pptx
+++ b/敬拜的心.pptx
@@ -169,7 +169,7 @@
           <a:lstStyle/>
           <a:p>
             <a:r>
-              <a:rPr lang="en-US" altLang="zh-TW" smtClean="0"/>
+              <a:rPr lang="en-US" altLang="zh-TW"/>
               <a:t>Click to edit Master title style</a:t>
             </a:r>
             <a:endParaRPr lang="zh-TW" altLang="en-US"/>
@@ -288,7 +288,7 @@
           </a:lstStyle>
           <a:p>
             <a:r>
-              <a:rPr lang="en-US" altLang="zh-TW" smtClean="0"/>
+              <a:rPr lang="en-US" altLang="zh-TW"/>
               <a:t>Click to edit Master subtitle style</a:t>
             </a:r>
             <a:endParaRPr lang="zh-TW" altLang="en-US"/>
@@ -312,7 +312,7 @@
           <a:p>
             <a:fld id="{1B6B0C8F-3A90-407A-8C03-10ABFA47D879}" type="datetimeFigureOut">
               <a:rPr lang="zh-TW" altLang="en-US" smtClean="0"/>
-              <a:t>2022/6/9</a:t>
+              <a:t>2026/6/12</a:t>
             </a:fld>
             <a:endParaRPr lang="zh-TW" altLang="en-US"/>
           </a:p>
@@ -406,7 +406,7 @@
           <a:lstStyle/>
           <a:p>
             <a:r>
-              <a:rPr lang="en-US" altLang="zh-TW" smtClean="0"/>
+              <a:rPr lang="en-US" altLang="zh-TW"/>
               <a:t>Click to edit Master title style</a:t>
             </a:r>
             <a:endParaRPr lang="zh-TW" altLang="en-US"/>
@@ -430,35 +430,35 @@
           <a:p>
             <a:pPr lvl="0"/>
             <a:r>
-              <a:rPr lang="en-US" altLang="zh-TW" smtClean="0"/>
+              <a:rPr lang="en-US" altLang="zh-TW"/>
               <a:t>Edit Master text styles</a:t>
             </a:r>
           </a:p>
           <a:p>
             <a:pPr lvl="1"/>
             <a:r>
-              <a:rPr lang="en-US" altLang="zh-TW" smtClean="0"/>
+              <a:rPr lang="en-US" altLang="zh-TW"/>
               <a:t>Second level</a:t>
             </a:r>
           </a:p>
           <a:p>
             <a:pPr lvl="2"/>
             <a:r>
-              <a:rPr lang="en-US" altLang="zh-TW" smtClean="0"/>
+              <a:rPr lang="en-US" altLang="zh-TW"/>
               <a:t>Third level</a:t>
             </a:r>
           </a:p>
           <a:p>
             <a:pPr lvl="3"/>
             <a:r>
-              <a:rPr lang="en-US" altLang="zh-TW" smtClean="0"/>
+              <a:rPr lang="en-US" altLang="zh-TW"/>
               <a:t>Fourth level</a:t>
             </a:r>
           </a:p>
           <a:p>
             <a:pPr lvl="4"/>
             <a:r>
-              <a:rPr lang="en-US" altLang="zh-TW" smtClean="0"/>
+              <a:rPr lang="en-US" altLang="zh-TW"/>
               <a:t>Fifth level</a:t>
             </a:r>
             <a:endParaRPr lang="zh-TW" altLang="en-US"/>
@@ -482,7 +482,7 @@
           <a:p>
             <a:fld id="{1B6B0C8F-3A90-407A-8C03-10ABFA47D879}" type="datetimeFigureOut">
               <a:rPr lang="zh-TW" altLang="en-US" smtClean="0"/>
-              <a:t>2022/6/9</a:t>
+              <a:t>2026/6/12</a:t>
             </a:fld>
             <a:endParaRPr lang="zh-TW" altLang="en-US"/>
           </a:p>
@@ -581,7 +581,7 @@
           <a:lstStyle/>
           <a:p>
             <a:r>
-              <a:rPr lang="en-US" altLang="zh-TW" smtClean="0"/>
+              <a:rPr lang="en-US" altLang="zh-TW"/>
               <a:t>Click to edit Master title style</a:t>
             </a:r>
             <a:endParaRPr lang="zh-TW" altLang="en-US"/>
@@ -610,35 +610,35 @@
           <a:p>
             <a:pPr lvl="0"/>
             <a:r>
-              <a:rPr lang="en-US" altLang="zh-TW" smtClean="0"/>
+              <a:rPr lang="en-US" altLang="zh-TW"/>
               <a:t>Edit Master text styles</a:t>
             </a:r>
           </a:p>
           <a:p>
             <a:pPr lvl="1"/>
             <a:r>
-              <a:rPr lang="en-US" altLang="zh-TW" smtClean="0"/>
+              <a:rPr lang="en-US" altLang="zh-TW"/>
               <a:t>Second level</a:t>
             </a:r>
           </a:p>
           <a:p>
             <a:pPr lvl="2"/>
             <a:r>
-              <a:rPr lang="en-US" altLang="zh-TW" smtClean="0"/>
+              <a:rPr lang="en-US" altLang="zh-TW"/>
               <a:t>Third level</a:t>
             </a:r>
           </a:p>
           <a:p>
             <a:pPr lvl="3"/>
             <a:r>
-              <a:rPr lang="en-US" altLang="zh-TW" smtClean="0"/>
+              <a:rPr lang="en-US" altLang="zh-TW"/>
               <a:t>Fourth level</a:t>
             </a:r>
           </a:p>
           <a:p>
             <a:pPr lvl="4"/>
             <a:r>
-              <a:rPr lang="en-US" altLang="zh-TW" smtClean="0"/>
+              <a:rPr lang="en-US" altLang="zh-TW"/>
               <a:t>Fifth level</a:t>
             </a:r>
             <a:endParaRPr lang="zh-TW" altLang="en-US"/>
@@ -662,7 +662,7 @@
           <a:p>
             <a:fld id="{1B6B0C8F-3A90-407A-8C03-10ABFA47D879}" type="datetimeFigureOut">
               <a:rPr lang="zh-TW" altLang="en-US" smtClean="0"/>
-              <a:t>2022/6/9</a:t>
+              <a:t>2026/6/12</a:t>
             </a:fld>
             <a:endParaRPr lang="zh-TW" altLang="en-US"/>
           </a:p>
@@ -756,7 +756,7 @@
           <a:lstStyle/>
           <a:p>
             <a:r>
-              <a:rPr lang="en-US" altLang="zh-TW" smtClean="0"/>
+              <a:rPr lang="en-US" altLang="zh-TW"/>
               <a:t>Click to edit Master title style</a:t>
             </a:r>
             <a:endParaRPr lang="zh-TW" altLang="en-US"/>
@@ -780,35 +780,35 @@
           <a:p>
             <a:pPr lvl="0"/>
             <a:r>
-              <a:rPr lang="en-US" altLang="zh-TW" smtClean="0"/>
+              <a:rPr lang="en-US" altLang="zh-TW"/>
               <a:t>Edit Master text styles</a:t>
             </a:r>
           </a:p>
           <a:p>
             <a:pPr lvl="1"/>
             <a:r>
-              <a:rPr lang="en-US" altLang="zh-TW" smtClean="0"/>
+              <a:rPr lang="en-US" altLang="zh-TW"/>
               <a:t>Second level</a:t>
             </a:r>
           </a:p>
           <a:p>
             <a:pPr lvl="2"/>
             <a:r>
-              <a:rPr lang="en-US" altLang="zh-TW" smtClean="0"/>
+              <a:rPr lang="en-US" altLang="zh-TW"/>
               <a:t>Third level</a:t>
             </a:r>
           </a:p>
           <a:p>
             <a:pPr lvl="3"/>
             <a:r>
-              <a:rPr lang="en-US" altLang="zh-TW" smtClean="0"/>
+              <a:rPr lang="en-US" altLang="zh-TW"/>
               <a:t>Fourth level</a:t>
             </a:r>
           </a:p>
           <a:p>
             <a:pPr lvl="4"/>
             <a:r>
-              <a:rPr lang="en-US" altLang="zh-TW" smtClean="0"/>
+              <a:rPr lang="en-US" altLang="zh-TW"/>
               <a:t>Fifth level</a:t>
             </a:r>
             <a:endParaRPr lang="zh-TW" altLang="en-US"/>
@@ -832,7 +832,7 @@
           <a:p>
             <a:fld id="{1B6B0C8F-3A90-407A-8C03-10ABFA47D879}" type="datetimeFigureOut">
               <a:rPr lang="zh-TW" altLang="en-US" smtClean="0"/>
-              <a:t>2022/6/9</a:t>
+              <a:t>2026/6/12</a:t>
             </a:fld>
             <a:endParaRPr lang="zh-TW" altLang="en-US"/>
           </a:p>
@@ -935,7 +935,7 @@
           </a:lstStyle>
           <a:p>
             <a:r>
-              <a:rPr lang="en-US" altLang="zh-TW" smtClean="0"/>
+              <a:rPr lang="en-US" altLang="zh-TW"/>
               <a:t>Click to edit Master title style</a:t>
             </a:r>
             <a:endParaRPr lang="zh-TW" altLang="en-US"/>
@@ -1055,7 +1055,7 @@
           <a:p>
             <a:pPr lvl="0"/>
             <a:r>
-              <a:rPr lang="en-US" altLang="zh-TW" smtClean="0"/>
+              <a:rPr lang="en-US" altLang="zh-TW"/>
               <a:t>Edit Master text styles</a:t>
             </a:r>
           </a:p>
@@ -1078,7 +1078,7 @@
           <a:p>
             <a:fld id="{1B6B0C8F-3A90-407A-8C03-10ABFA47D879}" type="datetimeFigureOut">
               <a:rPr lang="zh-TW" altLang="en-US" smtClean="0"/>
-              <a:t>2022/6/9</a:t>
+              <a:t>2026/6/12</a:t>
             </a:fld>
             <a:endParaRPr lang="zh-TW" altLang="en-US"/>
           </a:p>
@@ -1172,7 +1172,7 @@
           <a:lstStyle/>
           <a:p>
             <a:r>
-              <a:rPr lang="en-US" altLang="zh-TW" smtClean="0"/>
+              <a:rPr lang="en-US" altLang="zh-TW"/>
               <a:t>Click to edit Master title style</a:t>
             </a:r>
             <a:endParaRPr lang="zh-TW" altLang="en-US"/>
@@ -1229,35 +1229,35 @@
           <a:p>
             <a:pPr lvl="0"/>
             <a:r>
-              <a:rPr lang="en-US" altLang="zh-TW" smtClean="0"/>
+              <a:rPr lang="en-US" altLang="zh-TW"/>
               <a:t>Edit Master text styles</a:t>
             </a:r>
           </a:p>
           <a:p>
             <a:pPr lvl="1"/>
             <a:r>
-              <a:rPr lang="en-US" altLang="zh-TW" smtClean="0"/>
+              <a:rPr lang="en-US" altLang="zh-TW"/>
               <a:t>Second level</a:t>
             </a:r>
           </a:p>
           <a:p>
             <a:pPr lvl="2"/>
             <a:r>
-              <a:rPr lang="en-US" altLang="zh-TW" smtClean="0"/>
+              <a:rPr lang="en-US" altLang="zh-TW"/>
               <a:t>Third level</a:t>
             </a:r>
           </a:p>
           <a:p>
             <a:pPr lvl="3"/>
             <a:r>
-              <a:rPr lang="en-US" altLang="zh-TW" smtClean="0"/>
+              <a:rPr lang="en-US" altLang="zh-TW"/>
               <a:t>Fourth level</a:t>
             </a:r>
           </a:p>
           <a:p>
             <a:pPr lvl="4"/>
             <a:r>
-              <a:rPr lang="en-US" altLang="zh-TW" smtClean="0"/>
+              <a:rPr lang="en-US" altLang="zh-TW"/>
               <a:t>Fifth level</a:t>
             </a:r>
             <a:endParaRPr lang="zh-TW" altLang="en-US"/>
@@ -1314,35 +1314,35 @@
           <a:p>
             <a:pPr lvl="0"/>
             <a:r>
-              <a:rPr lang="en-US" altLang="zh-TW" smtClean="0"/>
+              <a:rPr lang="en-US" altLang="zh-TW"/>
               <a:t>Edit Master text styles</a:t>
             </a:r>
           </a:p>
           <a:p>
             <a:pPr lvl="1"/>
             <a:r>
-              <a:rPr lang="en-US" altLang="zh-TW" smtClean="0"/>
+              <a:rPr lang="en-US" altLang="zh-TW"/>
               <a:t>Second level</a:t>
             </a:r>
           </a:p>
           <a:p>
             <a:pPr lvl="2"/>
             <a:r>
-              <a:rPr lang="en-US" altLang="zh-TW" smtClean="0"/>
+              <a:rPr lang="en-US" altLang="zh-TW"/>
               <a:t>Third level</a:t>
             </a:r>
           </a:p>
           <a:p>
             <a:pPr lvl="3"/>
             <a:r>
-              <a:rPr lang="en-US" altLang="zh-TW" smtClean="0"/>
+              <a:rPr lang="en-US" altLang="zh-TW"/>
               <a:t>Fourth level</a:t>
             </a:r>
           </a:p>
           <a:p>
             <a:pPr lvl="4"/>
             <a:r>
-              <a:rPr lang="en-US" altLang="zh-TW" smtClean="0"/>
+              <a:rPr lang="en-US" altLang="zh-TW"/>
               <a:t>Fifth level</a:t>
             </a:r>
             <a:endParaRPr lang="zh-TW" altLang="en-US"/>
@@ -1366,7 +1366,7 @@
           <a:p>
             <a:fld id="{1B6B0C8F-3A90-407A-8C03-10ABFA47D879}" type="datetimeFigureOut">
               <a:rPr lang="zh-TW" altLang="en-US" smtClean="0"/>
-              <a:t>2022/6/9</a:t>
+              <a:t>2026/6/12</a:t>
             </a:fld>
             <a:endParaRPr lang="zh-TW" altLang="en-US"/>
           </a:p>
@@ -1464,7 +1464,7 @@
           </a:lstStyle>
           <a:p>
             <a:r>
-              <a:rPr lang="en-US" altLang="zh-TW" smtClean="0"/>
+              <a:rPr lang="en-US" altLang="zh-TW"/>
               <a:t>Click to edit Master title style</a:t>
             </a:r>
             <a:endParaRPr lang="zh-TW" altLang="en-US"/>
@@ -1530,7 +1530,7 @@
           <a:p>
             <a:pPr lvl="0"/>
             <a:r>
-              <a:rPr lang="en-US" altLang="zh-TW" smtClean="0"/>
+              <a:rPr lang="en-US" altLang="zh-TW"/>
               <a:t>Edit Master text styles</a:t>
             </a:r>
           </a:p>
@@ -1586,35 +1586,35 @@
           <a:p>
             <a:pPr lvl="0"/>
             <a:r>
-              <a:rPr lang="en-US" altLang="zh-TW" smtClean="0"/>
+              <a:rPr lang="en-US" altLang="zh-TW"/>
               <a:t>Edit Master text styles</a:t>
             </a:r>
           </a:p>
           <a:p>
             <a:pPr lvl="1"/>
             <a:r>
-              <a:rPr lang="en-US" altLang="zh-TW" smtClean="0"/>
+              <a:rPr lang="en-US" altLang="zh-TW"/>
               <a:t>Second level</a:t>
             </a:r>
           </a:p>
           <a:p>
             <a:pPr lvl="2"/>
             <a:r>
-              <a:rPr lang="en-US" altLang="zh-TW" smtClean="0"/>
+              <a:rPr lang="en-US" altLang="zh-TW"/>
               <a:t>Third level</a:t>
             </a:r>
           </a:p>
           <a:p>
             <a:pPr lvl="3"/>
             <a:r>
-              <a:rPr lang="en-US" altLang="zh-TW" smtClean="0"/>
+              <a:rPr lang="en-US" altLang="zh-TW"/>
               <a:t>Fourth level</a:t>
             </a:r>
           </a:p>
           <a:p>
             <a:pPr lvl="4"/>
             <a:r>
-              <a:rPr lang="en-US" altLang="zh-TW" smtClean="0"/>
+              <a:rPr lang="en-US" altLang="zh-TW"/>
               <a:t>Fifth level</a:t>
             </a:r>
             <a:endParaRPr lang="zh-TW" altLang="en-US"/>
@@ -1680,7 +1680,7 @@
           <a:p>
             <a:pPr lvl="0"/>
             <a:r>
-              <a:rPr lang="en-US" altLang="zh-TW" smtClean="0"/>
+              <a:rPr lang="en-US" altLang="zh-TW"/>
               <a:t>Edit Master text styles</a:t>
             </a:r>
           </a:p>
@@ -1736,35 +1736,35 @@
           <a:p>
             <a:pPr lvl="0"/>
             <a:r>
-              <a:rPr lang="en-US" altLang="zh-TW" smtClean="0"/>
+              <a:rPr lang="en-US" altLang="zh-TW"/>
               <a:t>Edit Master text styles</a:t>
             </a:r>
           </a:p>
           <a:p>
             <a:pPr lvl="1"/>
             <a:r>
-              <a:rPr lang="en-US" altLang="zh-TW" smtClean="0"/>
+              <a:rPr lang="en-US" altLang="zh-TW"/>
               <a:t>Second level</a:t>
             </a:r>
           </a:p>
           <a:p>
             <a:pPr lvl="2"/>
             <a:r>
-              <a:rPr lang="en-US" altLang="zh-TW" smtClean="0"/>
+              <a:rPr lang="en-US" altLang="zh-TW"/>
               <a:t>Third level</a:t>
             </a:r>
           </a:p>
           <a:p>
             <a:pPr lvl="3"/>
             <a:r>
-              <a:rPr lang="en-US" altLang="zh-TW" smtClean="0"/>
+              <a:rPr lang="en-US" altLang="zh-TW"/>
               <a:t>Fourth level</a:t>
             </a:r>
           </a:p>
           <a:p>
             <a:pPr lvl="4"/>
             <a:r>
-              <a:rPr lang="en-US" altLang="zh-TW" smtClean="0"/>
+              <a:rPr lang="en-US" altLang="zh-TW"/>
               <a:t>Fifth level</a:t>
             </a:r>
             <a:endParaRPr lang="zh-TW" altLang="en-US"/>
@@ -1788,7 +1788,7 @@
           <a:p>
             <a:fld id="{1B6B0C8F-3A90-407A-8C03-10ABFA47D879}" type="datetimeFigureOut">
               <a:rPr lang="zh-TW" altLang="en-US" smtClean="0"/>
-              <a:t>2022/6/9</a:t>
+              <a:t>2026/6/12</a:t>
             </a:fld>
             <a:endParaRPr lang="zh-TW" altLang="en-US"/>
           </a:p>
@@ -1882,7 +1882,7 @@
           <a:lstStyle/>
           <a:p>
             <a:r>
-              <a:rPr lang="en-US" altLang="zh-TW" smtClean="0"/>
+              <a:rPr lang="en-US" altLang="zh-TW"/>
               <a:t>Click to edit Master title style</a:t>
             </a:r>
             <a:endParaRPr lang="zh-TW" altLang="en-US"/>
@@ -1906,7 +1906,7 @@
           <a:p>
             <a:fld id="{1B6B0C8F-3A90-407A-8C03-10ABFA47D879}" type="datetimeFigureOut">
               <a:rPr lang="zh-TW" altLang="en-US" smtClean="0"/>
-              <a:t>2022/6/9</a:t>
+              <a:t>2026/6/12</a:t>
             </a:fld>
             <a:endParaRPr lang="zh-TW" altLang="en-US"/>
           </a:p>
@@ -2001,7 +2001,7 @@
           <a:p>
             <a:fld id="{1B6B0C8F-3A90-407A-8C03-10ABFA47D879}" type="datetimeFigureOut">
               <a:rPr lang="zh-TW" altLang="en-US" smtClean="0"/>
-              <a:t>2022/6/9</a:t>
+              <a:t>2026/6/12</a:t>
             </a:fld>
             <a:endParaRPr lang="zh-TW" altLang="en-US"/>
           </a:p>
@@ -2104,7 +2104,7 @@
           </a:lstStyle>
           <a:p>
             <a:r>
-              <a:rPr lang="en-US" altLang="zh-TW" smtClean="0"/>
+              <a:rPr lang="en-US" altLang="zh-TW"/>
               <a:t>Click to edit Master title style</a:t>
             </a:r>
             <a:endParaRPr lang="zh-TW" altLang="en-US"/>
@@ -2161,35 +2161,35 @@
           <a:p>
             <a:pPr lvl="0"/>
             <a:r>
-              <a:rPr lang="en-US" altLang="zh-TW" smtClean="0"/>
+              <a:rPr lang="en-US" altLang="zh-TW"/>
               <a:t>Edit Master text styles</a:t>
             </a:r>
           </a:p>
           <a:p>
             <a:pPr lvl="1"/>
             <a:r>
-              <a:rPr lang="en-US" altLang="zh-TW" smtClean="0"/>
+              <a:rPr lang="en-US" altLang="zh-TW"/>
               <a:t>Second level</a:t>
             </a:r>
           </a:p>
           <a:p>
             <a:pPr lvl="2"/>
             <a:r>
-              <a:rPr lang="en-US" altLang="zh-TW" smtClean="0"/>
+              <a:rPr lang="en-US" altLang="zh-TW"/>
               <a:t>Third level</a:t>
             </a:r>
           </a:p>
           <a:p>
             <a:pPr lvl="3"/>
             <a:r>
-              <a:rPr lang="en-US" altLang="zh-TW" smtClean="0"/>
+              <a:rPr lang="en-US" altLang="zh-TW"/>
               <a:t>Fourth level</a:t>
             </a:r>
           </a:p>
           <a:p>
             <a:pPr lvl="4"/>
             <a:r>
-              <a:rPr lang="en-US" altLang="zh-TW" smtClean="0"/>
+              <a:rPr lang="en-US" altLang="zh-TW"/>
               <a:t>Fifth level</a:t>
             </a:r>
             <a:endParaRPr lang="zh-TW" altLang="en-US"/>
@@ -2255,7 +2255,7 @@
           <a:p>
             <a:pPr lvl="0"/>
             <a:r>
-              <a:rPr lang="en-US" altLang="zh-TW" smtClean="0"/>
+              <a:rPr lang="en-US" altLang="zh-TW"/>
               <a:t>Edit Master text styles</a:t>
             </a:r>
           </a:p>
@@ -2278,7 +2278,7 @@
           <a:p>
             <a:fld id="{1B6B0C8F-3A90-407A-8C03-10ABFA47D879}" type="datetimeFigureOut">
               <a:rPr lang="zh-TW" altLang="en-US" smtClean="0"/>
-              <a:t>2022/6/9</a:t>
+              <a:t>2026/6/12</a:t>
             </a:fld>
             <a:endParaRPr lang="zh-TW" altLang="en-US"/>
           </a:p>
@@ -2381,7 +2381,7 @@
           </a:lstStyle>
           <a:p>
             <a:r>
-              <a:rPr lang="en-US" altLang="zh-TW" smtClean="0"/>
+              <a:rPr lang="en-US" altLang="zh-TW"/>
               <a:t>Click to edit Master title style</a:t>
             </a:r>
             <a:endParaRPr lang="zh-TW" altLang="en-US"/>
@@ -2446,7 +2446,7 @@
           </a:lstStyle>
           <a:p>
             <a:r>
-              <a:rPr lang="en-US" altLang="zh-TW" smtClean="0"/>
+              <a:rPr lang="en-US" altLang="zh-TW"/>
               <a:t>Click icon to add picture</a:t>
             </a:r>
             <a:endParaRPr lang="zh-TW" altLang="en-US"/>
@@ -2512,7 +2512,7 @@
           <a:p>
             <a:pPr lvl="0"/>
             <a:r>
-              <a:rPr lang="en-US" altLang="zh-TW" smtClean="0"/>
+              <a:rPr lang="en-US" altLang="zh-TW"/>
               <a:t>Edit Master text styles</a:t>
             </a:r>
           </a:p>
@@ -2535,7 +2535,7 @@
           <a:p>
             <a:fld id="{1B6B0C8F-3A90-407A-8C03-10ABFA47D879}" type="datetimeFigureOut">
               <a:rPr lang="zh-TW" altLang="en-US" smtClean="0"/>
-              <a:t>2022/6/9</a:t>
+              <a:t>2026/6/12</a:t>
             </a:fld>
             <a:endParaRPr lang="zh-TW" altLang="en-US"/>
           </a:p>
@@ -2649,10 +2649,9 @@
           <a:lstStyle/>
           <a:p>
             <a:r>
-              <a:rPr lang="zh-TW" altLang="en-US" smtClean="0"/>
+              <a:rPr lang="zh-TW" altLang="en-US"/>
               <a:t>按一下以編輯母片標題樣式</a:t>
             </a:r>
-            <a:endParaRPr lang="zh-TW" altLang="en-US"/>
           </a:p>
         </p:txBody>
       </p:sp>
@@ -2683,38 +2682,37 @@
           <a:p>
             <a:pPr lvl="0"/>
             <a:r>
-              <a:rPr lang="zh-TW" altLang="en-US" smtClean="0"/>
+              <a:rPr lang="zh-TW" altLang="en-US"/>
               <a:t>按一下以編輯母片文字樣式</a:t>
             </a:r>
           </a:p>
           <a:p>
             <a:pPr lvl="1"/>
             <a:r>
-              <a:rPr lang="zh-TW" altLang="en-US" smtClean="0"/>
+              <a:rPr lang="zh-TW" altLang="en-US"/>
               <a:t>第二層</a:t>
             </a:r>
           </a:p>
           <a:p>
             <a:pPr lvl="2"/>
             <a:r>
-              <a:rPr lang="zh-TW" altLang="en-US" smtClean="0"/>
+              <a:rPr lang="zh-TW" altLang="en-US"/>
               <a:t>第三層</a:t>
             </a:r>
           </a:p>
           <a:p>
             <a:pPr lvl="3"/>
             <a:r>
-              <a:rPr lang="zh-TW" altLang="en-US" smtClean="0"/>
+              <a:rPr lang="zh-TW" altLang="en-US"/>
               <a:t>第四層</a:t>
             </a:r>
           </a:p>
           <a:p>
             <a:pPr lvl="4"/>
             <a:r>
-              <a:rPr lang="zh-TW" altLang="en-US" smtClean="0"/>
+              <a:rPr lang="zh-TW" altLang="en-US"/>
               <a:t>第五層</a:t>
             </a:r>
-            <a:endParaRPr lang="zh-TW" altLang="en-US"/>
           </a:p>
         </p:txBody>
       </p:sp>
@@ -2753,7 +2751,7 @@
           <a:p>
             <a:fld id="{1B6B0C8F-3A90-407A-8C03-10ABFA47D879}" type="datetimeFigureOut">
               <a:rPr lang="zh-TW" altLang="en-US" smtClean="0"/>
-              <a:t>2022/6/9</a:t>
+              <a:t>2026/6/12</a:t>
             </a:fld>
             <a:endParaRPr lang="zh-TW" altLang="en-US"/>
           </a:p>
@@ -3165,24 +3163,7 @@
                 <a:latin typeface="微軟正黑體" pitchFamily="34" charset="-120"/>
                 <a:ea typeface="微軟正黑體" pitchFamily="34" charset="-120"/>
               </a:rPr>
-              <a:t>敬</a:t>
-            </a:r>
-            <a:r>
-              <a:rPr lang="zh-TW" altLang="en-US" sz="7200" b="1" i="1" dirty="0">
-                <a:solidFill>
-                  <a:srgbClr val="000066"/>
-                </a:solidFill>
-                <a:effectLst>
-                  <a:outerShdw blurRad="38100" dist="38100" dir="2700000" algn="tl">
-                    <a:srgbClr val="000000">
-                      <a:alpha val="43137"/>
-                    </a:srgbClr>
-                  </a:outerShdw>
-                </a:effectLst>
-                <a:latin typeface="微軟正黑體" pitchFamily="34" charset="-120"/>
-                <a:ea typeface="微軟正黑體" pitchFamily="34" charset="-120"/>
-              </a:rPr>
-              <a:t>拜的心</a:t>
+              <a:t>敬拜的心</a:t>
             </a:r>
           </a:p>
         </p:txBody>
@@ -3325,7 +3306,7 @@
                 <a:latin typeface="Microsoft JhengHei" panose="020B0604030504040204" pitchFamily="34" charset="-120"/>
                 <a:ea typeface="Microsoft JhengHei" panose="020B0604030504040204" pitchFamily="34" charset="-120"/>
               </a:rPr>
-              <a:t>正</a:t>
+              <a:t>正歌</a:t>
             </a:r>
             <a:r>
               <a:rPr lang="en-US" sz="4267" b="1" dirty="0">
@@ -3419,7 +3400,7 @@
                 <a:latin typeface="Microsoft JhengHei" panose="020B0604030504040204" pitchFamily="34" charset="-120"/>
                 <a:ea typeface="Microsoft JhengHei" panose="020B0604030504040204" pitchFamily="34" charset="-120"/>
               </a:rPr>
-              <a:t>袮</a:t>
+              <a:t>祢</a:t>
             </a:r>
             <a:endParaRPr lang="en-US" altLang="zh-TW" sz="6400" b="1" dirty="0">
               <a:solidFill>
@@ -3451,7 +3432,7 @@
                 <a:latin typeface="Microsoft JhengHei" panose="020B0604030504040204" pitchFamily="34" charset="-120"/>
                 <a:ea typeface="Microsoft JhengHei" panose="020B0604030504040204" pitchFamily="34" charset="-120"/>
               </a:rPr>
-              <a:t>袮</a:t>
+              <a:t>祢</a:t>
             </a:r>
             <a:r>
               <a:rPr lang="zh-TW" altLang="en-US" sz="6400" b="1" dirty="0">
@@ -3507,7 +3488,7 @@
                 <a:latin typeface="Microsoft JhengHei" panose="020B0604030504040204" pitchFamily="34" charset="-120"/>
                 <a:ea typeface="Microsoft JhengHei" panose="020B0604030504040204" pitchFamily="34" charset="-120"/>
               </a:rPr>
-              <a:t>正</a:t>
+              <a:t>正歌</a:t>
             </a:r>
             <a:r>
               <a:rPr lang="en-US" sz="4267" b="1" dirty="0">
@@ -3613,7 +3594,7 @@
                 <a:latin typeface="Microsoft JhengHei" panose="020B0604030504040204" pitchFamily="34" charset="-120"/>
                 <a:ea typeface="Microsoft JhengHei" panose="020B0604030504040204" pitchFamily="34" charset="-120"/>
               </a:rPr>
-              <a:t>袮</a:t>
+              <a:t>祢</a:t>
             </a:r>
             <a:r>
               <a:rPr lang="zh-TW" altLang="en-US" sz="6400" b="1" dirty="0">
@@ -3676,7 +3657,7 @@
                 <a:latin typeface="Microsoft JhengHei" panose="020B0604030504040204" pitchFamily="34" charset="-120"/>
                 <a:ea typeface="Microsoft JhengHei" panose="020B0604030504040204" pitchFamily="34" charset="-120"/>
               </a:rPr>
-              <a:t>副</a:t>
+              <a:t>副歌</a:t>
             </a:r>
             <a:r>
               <a:rPr lang="en-US" sz="4267" b="1" dirty="0">
@@ -3792,7 +3773,7 @@
                 <a:latin typeface="Microsoft JhengHei" panose="020B0604030504040204" pitchFamily="34" charset="-120"/>
                 <a:ea typeface="Microsoft JhengHei" panose="020B0604030504040204" pitchFamily="34" charset="-120"/>
               </a:rPr>
-              <a:t>袮</a:t>
+              <a:t>祢</a:t>
             </a:r>
             <a:r>
               <a:rPr lang="zh-TW" altLang="en-US" sz="6400" b="1" dirty="0">
@@ -3855,7 +3836,7 @@
                 <a:latin typeface="Microsoft JhengHei" panose="020B0604030504040204" pitchFamily="34" charset="-120"/>
                 <a:ea typeface="Microsoft JhengHei" panose="020B0604030504040204" pitchFamily="34" charset="-120"/>
               </a:rPr>
-              <a:t>副</a:t>
+              <a:t>副歌</a:t>
             </a:r>
             <a:r>
               <a:rPr lang="en-US" sz="4267" b="1" dirty="0">
@@ -3971,7 +3952,7 @@
                 <a:latin typeface="Microsoft JhengHei" panose="020B0604030504040204" pitchFamily="34" charset="-120"/>
                 <a:ea typeface="Microsoft JhengHei" panose="020B0604030504040204" pitchFamily="34" charset="-120"/>
               </a:rPr>
-              <a:t>袮</a:t>
+              <a:t>祢</a:t>
             </a:r>
             <a:endParaRPr lang="en-US" altLang="zh-TW" sz="6400" b="1" dirty="0">
               <a:solidFill>
@@ -4024,7 +4005,7 @@
                 <a:latin typeface="Microsoft JhengHei" panose="020B0604030504040204" pitchFamily="34" charset="-120"/>
                 <a:ea typeface="Microsoft JhengHei" panose="020B0604030504040204" pitchFamily="34" charset="-120"/>
               </a:rPr>
-              <a:t>副</a:t>
+              <a:t>副歌</a:t>
             </a:r>
             <a:r>
               <a:rPr lang="en-US" sz="4267" b="1" dirty="0">
@@ -4161,7 +4142,7 @@
                 <a:latin typeface="Microsoft JhengHei" panose="020B0604030504040204" pitchFamily="34" charset="-120"/>
                 <a:ea typeface="Microsoft JhengHei" panose="020B0604030504040204" pitchFamily="34" charset="-120"/>
               </a:rPr>
-              <a:t>副</a:t>
+              <a:t>副歌</a:t>
             </a:r>
             <a:r>
               <a:rPr lang="en-US" sz="4267" b="1" dirty="0">
@@ -4245,7 +4226,17 @@
                 <a:latin typeface="Microsoft JhengHei" panose="020B0604030504040204" pitchFamily="34" charset="-120"/>
                 <a:ea typeface="Microsoft JhengHei" panose="020B0604030504040204" pitchFamily="34" charset="-120"/>
               </a:rPr>
-              <a:t>心與心  心與</a:t>
+              <a:t>心與心</a:t>
+            </a:r>
+            <a:r>
+              <a:rPr lang="zh-CN" altLang="en-US" sz="6400" b="1" dirty="0">
+                <a:solidFill>
+                  <a:srgbClr val="000066"/>
+                </a:solidFill>
+                <a:latin typeface="Microsoft JhengHei" panose="020B0604030504040204" pitchFamily="34" charset="-120"/>
+                <a:ea typeface="Microsoft JhengHei" panose="020B0604030504040204" pitchFamily="34" charset="-120"/>
+              </a:rPr>
+              <a:t>　</a:t>
             </a:r>
             <a:r>
               <a:rPr lang="zh-TW" altLang="en-US" sz="6400" b="1" dirty="0">
@@ -4255,7 +4246,7 @@
                 <a:latin typeface="Microsoft JhengHei" panose="020B0604030504040204" pitchFamily="34" charset="-120"/>
                 <a:ea typeface="Microsoft JhengHei" panose="020B0604030504040204" pitchFamily="34" charset="-120"/>
               </a:rPr>
-              <a:t>心</a:t>
+              <a:t>心與心</a:t>
             </a:r>
             <a:endParaRPr lang="en-US" altLang="zh-TW" sz="6400" b="1" dirty="0">
               <a:solidFill>
@@ -4414,7 +4405,37 @@
                 <a:latin typeface="Microsoft JhengHei" panose="020B0604030504040204" pitchFamily="34" charset="-120"/>
                 <a:ea typeface="Microsoft JhengHei" panose="020B0604030504040204" pitchFamily="34" charset="-120"/>
               </a:rPr>
-              <a:t>被火煉  被潔淨</a:t>
+              <a:t>被火煉</a:t>
+            </a:r>
+            <a:r>
+              <a:rPr lang="zh-CN" altLang="en-US" sz="6400" b="1">
+                <a:solidFill>
+                  <a:srgbClr val="000066"/>
+                </a:solidFill>
+                <a:latin typeface="Microsoft JhengHei" panose="020B0604030504040204" pitchFamily="34" charset="-120"/>
+                <a:ea typeface="Microsoft JhengHei" panose="020B0604030504040204" pitchFamily="34" charset="-120"/>
+              </a:rPr>
+              <a:t>　</a:t>
+            </a:r>
+            <a:r>
+              <a:rPr lang="zh-TW" altLang="en-US" sz="6400" b="1">
+                <a:solidFill>
+                  <a:srgbClr val="000066"/>
+                </a:solidFill>
+                <a:latin typeface="Microsoft JhengHei" panose="020B0604030504040204" pitchFamily="34" charset="-120"/>
+                <a:ea typeface="Microsoft JhengHei" panose="020B0604030504040204" pitchFamily="34" charset="-120"/>
+              </a:rPr>
+              <a:t>被</a:t>
+            </a:r>
+            <a:r>
+              <a:rPr lang="zh-TW" altLang="en-US" sz="6400" b="1" dirty="0">
+                <a:solidFill>
+                  <a:srgbClr val="000066"/>
+                </a:solidFill>
+                <a:latin typeface="Microsoft JhengHei" panose="020B0604030504040204" pitchFamily="34" charset="-120"/>
+                <a:ea typeface="Microsoft JhengHei" panose="020B0604030504040204" pitchFamily="34" charset="-120"/>
+              </a:rPr>
+              <a:t>潔淨</a:t>
             </a:r>
             <a:endParaRPr lang="en-US" altLang="zh-TW" sz="6400" b="1" dirty="0">
               <a:solidFill>
@@ -4446,7 +4467,7 @@
                 <a:latin typeface="Microsoft JhengHei" panose="020B0604030504040204" pitchFamily="34" charset="-120"/>
                 <a:ea typeface="Microsoft JhengHei" panose="020B0604030504040204" pitchFamily="34" charset="-120"/>
               </a:rPr>
-              <a:t>袮</a:t>
+              <a:t>祢</a:t>
             </a:r>
             <a:r>
               <a:rPr lang="zh-TW" altLang="en-US" sz="6400" b="1" dirty="0">
@@ -4466,7 +4487,7 @@
                 <a:latin typeface="Microsoft JhengHei" panose="020B0604030504040204" pitchFamily="34" charset="-120"/>
                 <a:ea typeface="Microsoft JhengHei" panose="020B0604030504040204" pitchFamily="34" charset="-120"/>
               </a:rPr>
-              <a:t>袮</a:t>
+              <a:t>祢</a:t>
             </a:r>
             <a:endParaRPr lang="en-US" altLang="zh-TW" sz="6400" b="1" dirty="0">
               <a:solidFill>
